--- a/content/decks/media-studies/media-studies-s1-lesson-13-a4-section-a-in-authentic-format.pptx
+++ b/content/decks/media-studies/media-studies-s1-lesson-13-a4-section-a-in-authentic-format.pptx
@@ -3105,7 +3105,7 @@
                 <a:ea typeface="Georgia" pitchFamily="34" charset="-122"/>
                 <a:cs typeface="Georgia" pitchFamily="34" charset="-120"/>
               </a:rPr>
-              <a:t>Owning the stages (vertical) or the neighbours (horizontal). One company holds more of the chain.</a:t>
+              <a:t>Owning the stages (vertical) or the neighbors (horizontal). One company holds more of the chain.</a:t>
             </a:r>
             <a:endParaRPr lang="en-US" sz="1600" dirty="0"/>
           </a:p>
@@ -3454,7 +3454,7 @@
       </p:grpSpPr>
       <p:pic>
         <p:nvPicPr>
-          <p:cNvPr id="2" name="Image 0" descr="/private/tmp/claude-501/-Users-dogan-Documents-Vaults-Courses/a3a5132d-721f-4cd4-8ddd-e62e2b37b51b/scratchpad/img/crops/underwood-lindbergh_a591.jpg">    </p:cNvPr>
+          <p:cNvPr id="2" name="Image 0" descr="/Users/dogan/Documents/Vaults/Courses/wiki/classes/media-studies/decks/_build/img/crops/underwood-lindbergh_a591.jpg">    </p:cNvPr>
           <p:cNvPicPr>
             <a:picLocks noChangeAspect="1"/>
           </p:cNvPicPr>
@@ -6121,7 +6121,7 @@
                 <a:ea typeface="Georgia" pitchFamily="34" charset="-122"/>
                 <a:cs typeface="Georgia" pitchFamily="34" charset="-120"/>
               </a:rPr>
-              <a:t>Who regulates the case-study institution (Ofcom, NRTA, platform self-regulation), with what powers, and what that visibly changes: scheduling, cuts, ratings, and above all what never gets made. Add the regulation row to the document, and date it.</a:t>
+              <a:t>Who regulates the case-study institution (Ofcom, the FCC, platform self-regulation, per its home market), with what powers, and what that visibly changes: scheduling, cuts, ratings, and above all what never gets made. Add the regulation row to the document, and date it.</a:t>
             </a:r>
             <a:endParaRPr lang="en-US" sz="1900" dirty="0"/>
           </a:p>
